--- a/docs/sales/Horizon-Pitch-Deck.pptx
+++ b/docs/sales/Horizon-Pitch-Deck.pptx
@@ -11068,7 +11068,7 @@
                 <a:ea typeface="Calibri" pitchFamily="34" charset="-122"/>
                 <a:cs typeface="Calibri" pitchFamily="34" charset="-120"/>
               </a:rPr>
-              <a:t>Your contact details</a:t>
+              <a:t>Nexus AI Assurance FZCO  |  +971 52 377 7246</a:t>
             </a:r>
             <a:endParaRPr lang="en-US" sz="1400" dirty="0"/>
           </a:p>
